--- a/dist/초1/음악·미술/음악놀이/초1_음악·미술_음악놀이_01_박에맞춰노래하기_학생용.pptx
+++ b/dist/초1/음악·미술/음악놀이/초1_음악·미술_음악놀이_01_박에맞춰노래하기_학생용.pptx
@@ -114,34 +114,34 @@
   <p:extLst>
     <p:ext uri="{521415D9-36F7-43E2-AB2F-B90AF26B5E84}">
       <p14:sectionLst xmlns:p14="http://schemas.microsoft.com/office/powerpoint/2010/main">
-        <p14:section name="도입" id="{c1ec7f76-3cf2-21f3-8604-393bd1475fc3}">
+        <p14:section name="도입" id="{05415317-384f-75a0-906e-73ddab34f8a2}">
           <p14:sldIdLst>
             <p14:sldId id="256"/>
             <p14:sldId id="257"/>
           </p14:sldIdLst>
         </p14:section>
-        <p14:section name="개념" id="{4eefe059-1280-99db-098b-424055eeb6b6}">
+        <p14:section name="개념" id="{03a9becb-7148-6f54-0ca8-72c3b2345d97}">
           <p14:sldIdLst>
             <p14:sldId id="258"/>
           </p14:sldIdLst>
         </p14:section>
-        <p14:section name="연습" id="{9de05cc8-3758-c9d0-35ab-1b1a197d8bc8}">
+        <p14:section name="연습" id="{8e97773e-a5aa-add6-7db4-bdb748d75174}">
           <p14:sldIdLst>
             <p14:sldId id="259"/>
             <p14:sldId id="260"/>
           </p14:sldIdLst>
         </p14:section>
-        <p14:section name="확인" id="{56a22396-c8da-46ac-3e88-363612a48f2d}">
+        <p14:section name="확인" id="{a545aaed-d325-41e5-bf10-99b0e8056820}">
           <p14:sldIdLst>
             <p14:sldId id="261"/>
           </p14:sldIdLst>
         </p14:section>
-        <p14:section name="정리" id="{ad451cfd-74dc-8cc6-7bf2-06b0d99ea4f3}">
+        <p14:section name="정리" id="{ca115d99-5f5b-0983-1f26-d88238bc1a5d}">
           <p14:sldIdLst>
             <p14:sldId id="262"/>
           </p14:sldIdLst>
         </p14:section>
-        <p14:section name="보충" id="{883e278d-f201-c348-7fa9-f68fcc077331}">
+        <p14:section name="보충" id="{4ef2dc2c-7128-9eee-161a-e3966e0d4c36}">
           <p14:sldIdLst>
             <p14:sldId id="263"/>
           </p14:sldIdLst>

--- a/dist/초1/음악·미술/음악놀이/초1_음악·미술_음악놀이_01_박에맞춰노래하기_학생용.pptx
+++ b/dist/초1/음악·미술/음악놀이/초1_음악·미술_음악놀이_01_박에맞춰노래하기_학생용.pptx
@@ -114,34 +114,34 @@
   <p:extLst>
     <p:ext uri="{521415D9-36F7-43E2-AB2F-B90AF26B5E84}">
       <p14:sectionLst xmlns:p14="http://schemas.microsoft.com/office/powerpoint/2010/main">
-        <p14:section name="도입" id="{05415317-384f-75a0-906e-73ddab34f8a2}">
+        <p14:section name="도입" id="{9c6cd339-436e-deae-d08a-54c962c7df60}">
           <p14:sldIdLst>
             <p14:sldId id="256"/>
             <p14:sldId id="257"/>
           </p14:sldIdLst>
         </p14:section>
-        <p14:section name="개념" id="{03a9becb-7148-6f54-0ca8-72c3b2345d97}">
+        <p14:section name="개념" id="{b2fbe6e3-d3cb-92aa-078e-f7f039bf7d74}">
           <p14:sldIdLst>
             <p14:sldId id="258"/>
           </p14:sldIdLst>
         </p14:section>
-        <p14:section name="연습" id="{8e97773e-a5aa-add6-7db4-bdb748d75174}">
+        <p14:section name="연습" id="{5d988b0e-4431-e9f5-0c75-0a4c7228e6d3}">
           <p14:sldIdLst>
             <p14:sldId id="259"/>
             <p14:sldId id="260"/>
           </p14:sldIdLst>
         </p14:section>
-        <p14:section name="확인" id="{a545aaed-d325-41e5-bf10-99b0e8056820}">
+        <p14:section name="확인" id="{26da05f0-54da-0938-2fbe-d7c04f0a73f1}">
           <p14:sldIdLst>
             <p14:sldId id="261"/>
           </p14:sldIdLst>
         </p14:section>
-        <p14:section name="정리" id="{ca115d99-5f5b-0983-1f26-d88238bc1a5d}">
+        <p14:section name="정리" id="{a2d873ae-69f6-c65b-2e38-5262bf779838}">
           <p14:sldIdLst>
             <p14:sldId id="262"/>
           </p14:sldIdLst>
         </p14:section>
-        <p14:section name="보충" id="{4ef2dc2c-7128-9eee-161a-e3966e0d4c36}">
+        <p14:section name="보충" id="{6229cb7b-7326-f3c1-09ab-cfd816f77a76}">
           <p14:sldIdLst>
             <p14:sldId id="263"/>
           </p14:sldIdLst>
